--- a/assets/fiches/B8-fiche-1h.pptx
+++ b/assets/fiches/B8-fiche-1h.pptx
@@ -3968,7 +3968,7 @@
                 </a:solidFill>
                 <a:latin typeface="Arial"/>
               </a:rPr>
-              <a:t>. Beaucoup d'entre nous finissent le mois en se demandant où est passé l'argent. Sans suivi,…</a:t>
+              <a:t>. Beaucoup d'entre nous finissent le mois en se demandant où est passé l'argent. Sans suivi, les petites dépenses s'accumulent silencieusement. Un budget bien tenu, c'est la liberté de faire des choix éclairés.</a:t>
             </a:r>
           </a:p>
         </p:txBody>
@@ -4215,7 +4215,7 @@
                 </a:solidFill>
                 <a:latin typeface="Arial"/>
               </a:rPr>
-              <a:t>. Il existe aujourd'hui des dizaines d'applications pour gérer ses finances. Voici les plus …</a:t>
+              <a:t>. Il existe aujourd'hui des dizaines d'applications pour gérer ses finances. Voici les plus populaires en France, pour tous les profils :</a:t>
             </a:r>
           </a:p>
         </p:txBody>
@@ -4462,7 +4462,7 @@
                 </a:solidFill>
                 <a:latin typeface="Arial"/>
               </a:rPr>
-              <a:t>. Pas besoin de dépenser de l'argent pour gérer son argent ! La plupart des outils proposent…</a:t>
+              <a:t>. Pas besoin de dépenser de l'argent pour gérer son argent ! La plupart des outils proposent une version gratuite très complète. Voici comment choisir :</a:t>
             </a:r>
           </a:p>
         </p:txBody>
@@ -4709,7 +4709,7 @@
                 </a:solidFill>
                 <a:latin typeface="Arial"/>
               </a:rPr>
-              <a:t>. Se lancer dans la gestion budgétaire numérique ne prend que quelques minutes. Suivez ces é…</a:t>
+              <a:t>. Se lancer dans la gestion budgétaire numérique ne prend que quelques minutes. Suivez ces étapes simples pour démarrer sur de bonnes bases :</a:t>
             </a:r>
           </a:p>
         </p:txBody>
@@ -4956,7 +4956,7 @@
                 </a:solidFill>
                 <a:latin typeface="Arial"/>
               </a:rPr>
-              <a:t>. Au-delà des applications, quelques méthodes éprouvées permettent de transformer ses habitu…</a:t>
+              <a:t>. Au-delà des applications, quelques méthodes éprouvées permettent de transformer ses habitudes financières en profondeur :</a:t>
             </a:r>
           </a:p>
         </p:txBody>
@@ -5203,7 +5203,7 @@
                 </a:solidFill>
                 <a:latin typeface="Arial"/>
               </a:rPr>
-              <a:t>. La gestion de budget ne se limite pas au suivi des dépenses. Il existe aussi d'excellents …</a:t>
+              <a:t>. La gestion de budget ne se limite pas au suivi des dépenses. Il existe aussi d'excellents outils numériques pour payer moins cher au quotidien :</a:t>
             </a:r>
           </a:p>
         </p:txBody>
@@ -5450,7 +5450,7 @@
                 </a:solidFill>
                 <a:latin typeface="Arial"/>
               </a:rPr>
-              <a:t>. La principale réticence à utiliser ces outils est souvent la question de la sécurité. Voic…</a:t>
+              <a:t>. La principale réticence à utiliser ces outils est souvent la question de la sécurité. Voici les éléments essentiels pour faire des choix éclairés et serein :</a:t>
             </a:r>
           </a:p>
         </p:txBody>
@@ -5697,7 +5697,7 @@
                 </a:solidFill>
                 <a:latin typeface="Arial"/>
               </a:rPr>
-              <a:t>. La gestion de budget numérique n'est pas réservée aux experts en finance. Avec les bons ou…</a:t>
+              <a:t>. La gestion de budget numérique n'est pas réservée aux experts en finance. Avec les bons outils, quelques minutes par semaine suffisent pour transformer votre relation à l'argent.</a:t>
             </a:r>
           </a:p>
         </p:txBody>

--- a/assets/fiches/B8-fiche-1h.pptx
+++ b/assets/fiches/B8-fiche-1h.pptx
@@ -3096,9 +3096,35 @@
         <p:nvPr/>
       </p:nvGrpSpPr>
       <p:grpSpPr/>
-      <p:sp>
-        <p:nvSpPr>
-          <p:cNvPr id="2" name="TextBox 1"/>
+      <p:pic>
+        <p:nvPicPr>
+          <p:cNvPr id="2" name="Picture 1" descr="bg-p1.png"/>
+          <p:cNvPicPr>
+            <a:picLocks noChangeAspect="1"/>
+          </p:cNvPicPr>
+          <p:nvPr/>
+        </p:nvPicPr>
+        <p:blipFill>
+          <a:blip r:embed="rId2">
+            <a:alphaModFix amt="80000"/>
+          </a:blip>
+          <a:stretch>
+            <a:fillRect/>
+          </a:stretch>
+        </p:blipFill>
+        <p:spPr>
+          <a:xfrm>
+            <a:off x="0" y="0"/>
+            <a:ext cx="7556399" cy="10692000"/>
+          </a:xfrm>
+          <a:prstGeom prst="rect">
+            <a:avLst/>
+          </a:prstGeom>
+        </p:spPr>
+      </p:pic>
+      <p:sp>
+        <p:nvSpPr>
+          <p:cNvPr id="3" name="TextBox 2"/>
           <p:cNvSpPr txBox="1"/>
           <p:nvPr/>
         </p:nvSpPr>
@@ -3159,7 +3185,7 @@
       </p:sp>
       <p:sp>
         <p:nvSpPr>
-          <p:cNvPr id="3" name="Rectangle 2"/>
+          <p:cNvPr id="4" name="Rectangle 3"/>
           <p:cNvSpPr/>
           <p:nvPr/>
         </p:nvSpPr>
@@ -3202,7 +3228,7 @@
       </p:sp>
       <p:sp>
         <p:nvSpPr>
-          <p:cNvPr id="4" name="TextBox 3"/>
+          <p:cNvPr id="5" name="TextBox 4"/>
           <p:cNvSpPr txBox="1"/>
           <p:nvPr/>
         </p:nvSpPr>
@@ -3320,7 +3346,7 @@
       </p:sp>
       <p:sp>
         <p:nvSpPr>
-          <p:cNvPr id="5" name="Rectangle 4"/>
+          <p:cNvPr id="6" name="Rectangle 5"/>
           <p:cNvSpPr/>
           <p:nvPr/>
         </p:nvSpPr>
@@ -3363,7 +3389,7 @@
       </p:sp>
       <p:sp>
         <p:nvSpPr>
-          <p:cNvPr id="6" name="TextBox 5"/>
+          <p:cNvPr id="7" name="TextBox 6"/>
           <p:cNvSpPr txBox="1"/>
           <p:nvPr/>
         </p:nvSpPr>
@@ -3481,7 +3507,7 @@
       </p:sp>
       <p:sp>
         <p:nvSpPr>
-          <p:cNvPr id="7" name="Rectangle 6"/>
+          <p:cNvPr id="8" name="Rectangle 7"/>
           <p:cNvSpPr/>
           <p:nvPr/>
         </p:nvSpPr>
@@ -3524,7 +3550,7 @@
       </p:sp>
       <p:sp>
         <p:nvSpPr>
-          <p:cNvPr id="8" name="Rectangle 7"/>
+          <p:cNvPr id="9" name="Rectangle 8"/>
           <p:cNvSpPr/>
           <p:nvPr/>
         </p:nvSpPr>
@@ -3565,7 +3591,7 @@
       </p:sp>
       <p:sp>
         <p:nvSpPr>
-          <p:cNvPr id="9" name="Rectangle 8"/>
+          <p:cNvPr id="10" name="Rectangle 9"/>
           <p:cNvSpPr/>
           <p:nvPr/>
         </p:nvSpPr>
@@ -3606,7 +3632,7 @@
       </p:sp>
       <p:sp>
         <p:nvSpPr>
-          <p:cNvPr id="10" name="TextBox 9"/>
+          <p:cNvPr id="11" name="TextBox 10"/>
           <p:cNvSpPr txBox="1"/>
           <p:nvPr/>
         </p:nvSpPr>
@@ -3648,7 +3674,7 @@
       </p:sp>
       <p:sp>
         <p:nvSpPr>
-          <p:cNvPr id="11" name="TextBox 10"/>
+          <p:cNvPr id="12" name="TextBox 11"/>
           <p:cNvSpPr txBox="1"/>
           <p:nvPr/>
         </p:nvSpPr>
@@ -3728,7 +3754,7 @@
       </p:sp>
       <p:sp>
         <p:nvSpPr>
-          <p:cNvPr id="12" name="Rectangle 11"/>
+          <p:cNvPr id="13" name="Rectangle 12"/>
           <p:cNvSpPr/>
           <p:nvPr/>
         </p:nvSpPr>
@@ -3771,7 +3797,7 @@
       </p:sp>
       <p:sp>
         <p:nvSpPr>
-          <p:cNvPr id="13" name="Rectangle 12"/>
+          <p:cNvPr id="14" name="Rectangle 13"/>
           <p:cNvSpPr/>
           <p:nvPr/>
         </p:nvSpPr>
@@ -3812,7 +3838,7 @@
       </p:sp>
       <p:sp>
         <p:nvSpPr>
-          <p:cNvPr id="14" name="Rectangle 13"/>
+          <p:cNvPr id="15" name="Rectangle 14"/>
           <p:cNvSpPr/>
           <p:nvPr/>
         </p:nvSpPr>
@@ -3853,7 +3879,7 @@
       </p:sp>
       <p:sp>
         <p:nvSpPr>
-          <p:cNvPr id="15" name="TextBox 14"/>
+          <p:cNvPr id="16" name="TextBox 15"/>
           <p:cNvSpPr txBox="1"/>
           <p:nvPr/>
         </p:nvSpPr>
@@ -3895,7 +3921,7 @@
       </p:sp>
       <p:sp>
         <p:nvSpPr>
-          <p:cNvPr id="16" name="TextBox 15"/>
+          <p:cNvPr id="17" name="TextBox 16"/>
           <p:cNvSpPr txBox="1"/>
           <p:nvPr/>
         </p:nvSpPr>
@@ -3975,7 +4001,7 @@
       </p:sp>
       <p:sp>
         <p:nvSpPr>
-          <p:cNvPr id="17" name="Rectangle 16"/>
+          <p:cNvPr id="18" name="Rectangle 17"/>
           <p:cNvSpPr/>
           <p:nvPr/>
         </p:nvSpPr>
@@ -4018,7 +4044,7 @@
       </p:sp>
       <p:sp>
         <p:nvSpPr>
-          <p:cNvPr id="18" name="Rectangle 17"/>
+          <p:cNvPr id="19" name="Rectangle 18"/>
           <p:cNvSpPr/>
           <p:nvPr/>
         </p:nvSpPr>
@@ -4059,7 +4085,7 @@
       </p:sp>
       <p:sp>
         <p:nvSpPr>
-          <p:cNvPr id="19" name="Rectangle 18"/>
+          <p:cNvPr id="20" name="Rectangle 19"/>
           <p:cNvSpPr/>
           <p:nvPr/>
         </p:nvSpPr>
@@ -4100,7 +4126,7 @@
       </p:sp>
       <p:sp>
         <p:nvSpPr>
-          <p:cNvPr id="20" name="TextBox 19"/>
+          <p:cNvPr id="21" name="TextBox 20"/>
           <p:cNvSpPr txBox="1"/>
           <p:nvPr/>
         </p:nvSpPr>
@@ -4142,7 +4168,7 @@
       </p:sp>
       <p:sp>
         <p:nvSpPr>
-          <p:cNvPr id="21" name="TextBox 20"/>
+          <p:cNvPr id="22" name="TextBox 21"/>
           <p:cNvSpPr txBox="1"/>
           <p:nvPr/>
         </p:nvSpPr>
@@ -4222,7 +4248,7 @@
       </p:sp>
       <p:sp>
         <p:nvSpPr>
-          <p:cNvPr id="22" name="Rectangle 21"/>
+          <p:cNvPr id="23" name="Rectangle 22"/>
           <p:cNvSpPr/>
           <p:nvPr/>
         </p:nvSpPr>
@@ -4265,7 +4291,7 @@
       </p:sp>
       <p:sp>
         <p:nvSpPr>
-          <p:cNvPr id="23" name="Rectangle 22"/>
+          <p:cNvPr id="24" name="Rectangle 23"/>
           <p:cNvSpPr/>
           <p:nvPr/>
         </p:nvSpPr>
@@ -4306,7 +4332,7 @@
       </p:sp>
       <p:sp>
         <p:nvSpPr>
-          <p:cNvPr id="24" name="Rectangle 23"/>
+          <p:cNvPr id="25" name="Rectangle 24"/>
           <p:cNvSpPr/>
           <p:nvPr/>
         </p:nvSpPr>
@@ -4347,7 +4373,7 @@
       </p:sp>
       <p:sp>
         <p:nvSpPr>
-          <p:cNvPr id="25" name="TextBox 24"/>
+          <p:cNvPr id="26" name="TextBox 25"/>
           <p:cNvSpPr txBox="1"/>
           <p:nvPr/>
         </p:nvSpPr>
@@ -4389,7 +4415,7 @@
       </p:sp>
       <p:sp>
         <p:nvSpPr>
-          <p:cNvPr id="26" name="TextBox 25"/>
+          <p:cNvPr id="27" name="TextBox 26"/>
           <p:cNvSpPr txBox="1"/>
           <p:nvPr/>
         </p:nvSpPr>
@@ -4469,7 +4495,7 @@
       </p:sp>
       <p:sp>
         <p:nvSpPr>
-          <p:cNvPr id="27" name="Rectangle 26"/>
+          <p:cNvPr id="28" name="Rectangle 27"/>
           <p:cNvSpPr/>
           <p:nvPr/>
         </p:nvSpPr>
@@ -4512,7 +4538,7 @@
       </p:sp>
       <p:sp>
         <p:nvSpPr>
-          <p:cNvPr id="28" name="Rectangle 27"/>
+          <p:cNvPr id="29" name="Rectangle 28"/>
           <p:cNvSpPr/>
           <p:nvPr/>
         </p:nvSpPr>
@@ -4553,7 +4579,7 @@
       </p:sp>
       <p:sp>
         <p:nvSpPr>
-          <p:cNvPr id="29" name="Rectangle 28"/>
+          <p:cNvPr id="30" name="Rectangle 29"/>
           <p:cNvSpPr/>
           <p:nvPr/>
         </p:nvSpPr>
@@ -4594,7 +4620,7 @@
       </p:sp>
       <p:sp>
         <p:nvSpPr>
-          <p:cNvPr id="30" name="TextBox 29"/>
+          <p:cNvPr id="31" name="TextBox 30"/>
           <p:cNvSpPr txBox="1"/>
           <p:nvPr/>
         </p:nvSpPr>
@@ -4636,7 +4662,7 @@
       </p:sp>
       <p:sp>
         <p:nvSpPr>
-          <p:cNvPr id="31" name="TextBox 30"/>
+          <p:cNvPr id="32" name="TextBox 31"/>
           <p:cNvSpPr txBox="1"/>
           <p:nvPr/>
         </p:nvSpPr>
@@ -4716,7 +4742,7 @@
       </p:sp>
       <p:sp>
         <p:nvSpPr>
-          <p:cNvPr id="32" name="Rectangle 31"/>
+          <p:cNvPr id="33" name="Rectangle 32"/>
           <p:cNvSpPr/>
           <p:nvPr/>
         </p:nvSpPr>
@@ -4759,7 +4785,7 @@
       </p:sp>
       <p:sp>
         <p:nvSpPr>
-          <p:cNvPr id="33" name="Rectangle 32"/>
+          <p:cNvPr id="34" name="Rectangle 33"/>
           <p:cNvSpPr/>
           <p:nvPr/>
         </p:nvSpPr>
@@ -4800,7 +4826,7 @@
       </p:sp>
       <p:sp>
         <p:nvSpPr>
-          <p:cNvPr id="34" name="Rectangle 33"/>
+          <p:cNvPr id="35" name="Rectangle 34"/>
           <p:cNvSpPr/>
           <p:nvPr/>
         </p:nvSpPr>
@@ -4841,7 +4867,7 @@
       </p:sp>
       <p:sp>
         <p:nvSpPr>
-          <p:cNvPr id="35" name="TextBox 34"/>
+          <p:cNvPr id="36" name="TextBox 35"/>
           <p:cNvSpPr txBox="1"/>
           <p:nvPr/>
         </p:nvSpPr>
@@ -4883,7 +4909,7 @@
       </p:sp>
       <p:sp>
         <p:nvSpPr>
-          <p:cNvPr id="36" name="TextBox 35"/>
+          <p:cNvPr id="37" name="TextBox 36"/>
           <p:cNvSpPr txBox="1"/>
           <p:nvPr/>
         </p:nvSpPr>
@@ -4963,7 +4989,7 @@
       </p:sp>
       <p:sp>
         <p:nvSpPr>
-          <p:cNvPr id="37" name="Rectangle 36"/>
+          <p:cNvPr id="38" name="Rectangle 37"/>
           <p:cNvSpPr/>
           <p:nvPr/>
         </p:nvSpPr>
@@ -5006,7 +5032,7 @@
       </p:sp>
       <p:sp>
         <p:nvSpPr>
-          <p:cNvPr id="38" name="Rectangle 37"/>
+          <p:cNvPr id="39" name="Rectangle 38"/>
           <p:cNvSpPr/>
           <p:nvPr/>
         </p:nvSpPr>
@@ -5047,7 +5073,7 @@
       </p:sp>
       <p:sp>
         <p:nvSpPr>
-          <p:cNvPr id="39" name="Rectangle 38"/>
+          <p:cNvPr id="40" name="Rectangle 39"/>
           <p:cNvSpPr/>
           <p:nvPr/>
         </p:nvSpPr>
@@ -5088,7 +5114,7 @@
       </p:sp>
       <p:sp>
         <p:nvSpPr>
-          <p:cNvPr id="40" name="TextBox 39"/>
+          <p:cNvPr id="41" name="TextBox 40"/>
           <p:cNvSpPr txBox="1"/>
           <p:nvPr/>
         </p:nvSpPr>
@@ -5130,7 +5156,7 @@
       </p:sp>
       <p:sp>
         <p:nvSpPr>
-          <p:cNvPr id="41" name="TextBox 40"/>
+          <p:cNvPr id="42" name="TextBox 41"/>
           <p:cNvSpPr txBox="1"/>
           <p:nvPr/>
         </p:nvSpPr>
@@ -5210,7 +5236,7 @@
       </p:sp>
       <p:sp>
         <p:nvSpPr>
-          <p:cNvPr id="42" name="Rectangle 41"/>
+          <p:cNvPr id="43" name="Rectangle 42"/>
           <p:cNvSpPr/>
           <p:nvPr/>
         </p:nvSpPr>
@@ -5253,7 +5279,7 @@
       </p:sp>
       <p:sp>
         <p:nvSpPr>
-          <p:cNvPr id="43" name="Rectangle 42"/>
+          <p:cNvPr id="44" name="Rectangle 43"/>
           <p:cNvSpPr/>
           <p:nvPr/>
         </p:nvSpPr>
@@ -5294,7 +5320,7 @@
       </p:sp>
       <p:sp>
         <p:nvSpPr>
-          <p:cNvPr id="44" name="Rectangle 43"/>
+          <p:cNvPr id="45" name="Rectangle 44"/>
           <p:cNvSpPr/>
           <p:nvPr/>
         </p:nvSpPr>
@@ -5335,7 +5361,7 @@
       </p:sp>
       <p:sp>
         <p:nvSpPr>
-          <p:cNvPr id="45" name="TextBox 44"/>
+          <p:cNvPr id="46" name="TextBox 45"/>
           <p:cNvSpPr txBox="1"/>
           <p:nvPr/>
         </p:nvSpPr>
@@ -5377,7 +5403,7 @@
       </p:sp>
       <p:sp>
         <p:nvSpPr>
-          <p:cNvPr id="46" name="TextBox 45"/>
+          <p:cNvPr id="47" name="TextBox 46"/>
           <p:cNvSpPr txBox="1"/>
           <p:nvPr/>
         </p:nvSpPr>
@@ -5457,7 +5483,7 @@
       </p:sp>
       <p:sp>
         <p:nvSpPr>
-          <p:cNvPr id="47" name="Rectangle 46"/>
+          <p:cNvPr id="48" name="Rectangle 47"/>
           <p:cNvSpPr/>
           <p:nvPr/>
         </p:nvSpPr>
@@ -5500,7 +5526,7 @@
       </p:sp>
       <p:sp>
         <p:nvSpPr>
-          <p:cNvPr id="48" name="Rectangle 47"/>
+          <p:cNvPr id="49" name="Rectangle 48"/>
           <p:cNvSpPr/>
           <p:nvPr/>
         </p:nvSpPr>
@@ -5541,7 +5567,7 @@
       </p:sp>
       <p:sp>
         <p:nvSpPr>
-          <p:cNvPr id="49" name="Rectangle 48"/>
+          <p:cNvPr id="50" name="Rectangle 49"/>
           <p:cNvSpPr/>
           <p:nvPr/>
         </p:nvSpPr>
@@ -5582,7 +5608,7 @@
       </p:sp>
       <p:sp>
         <p:nvSpPr>
-          <p:cNvPr id="50" name="TextBox 49"/>
+          <p:cNvPr id="51" name="TextBox 50"/>
           <p:cNvSpPr txBox="1"/>
           <p:nvPr/>
         </p:nvSpPr>
@@ -5624,7 +5650,7 @@
       </p:sp>
       <p:sp>
         <p:nvSpPr>
-          <p:cNvPr id="51" name="TextBox 50"/>
+          <p:cNvPr id="52" name="TextBox 51"/>
           <p:cNvSpPr txBox="1"/>
           <p:nvPr/>
         </p:nvSpPr>
@@ -5704,7 +5730,7 @@
       </p:sp>
       <p:sp>
         <p:nvSpPr>
-          <p:cNvPr id="52" name="Rectangle 51"/>
+          <p:cNvPr id="53" name="Rectangle 52"/>
           <p:cNvSpPr/>
           <p:nvPr/>
         </p:nvSpPr>
@@ -5745,7 +5771,7 @@
       </p:sp>
       <p:sp>
         <p:nvSpPr>
-          <p:cNvPr id="53" name="TextBox 52"/>
+          <p:cNvPr id="54" name="TextBox 53"/>
           <p:cNvSpPr txBox="1"/>
           <p:nvPr/>
         </p:nvSpPr>

--- a/assets/fiches/B8-fiche-1h.pptx
+++ b/assets/fiches/B8-fiche-1h.pptx
@@ -3083,9 +3083,12 @@
   <p:cSld>
     <p:bg>
       <p:bgPr>
-        <a:solidFill>
-          <a:srgbClr val="FFFFFF"/>
-        </a:solidFill>
+        <a:blipFill>
+          <a:blip r:embed="rId2"/>
+          <a:stretch>
+            <a:fillRect/>
+          </a:stretch>
+        </a:blipFill>
         <a:effectLst/>
       </p:bgPr>
     </p:bg>
@@ -3096,35 +3099,9 @@
         <p:nvPr/>
       </p:nvGrpSpPr>
       <p:grpSpPr/>
-      <p:pic>
-        <p:nvPicPr>
-          <p:cNvPr id="2" name="Picture 1" descr="bg-p1.png"/>
-          <p:cNvPicPr>
-            <a:picLocks noChangeAspect="1"/>
-          </p:cNvPicPr>
-          <p:nvPr/>
-        </p:nvPicPr>
-        <p:blipFill>
-          <a:blip r:embed="rId2">
-            <a:alphaModFix amt="80000"/>
-          </a:blip>
-          <a:stretch>
-            <a:fillRect/>
-          </a:stretch>
-        </p:blipFill>
-        <p:spPr>
-          <a:xfrm>
-            <a:off x="0" y="0"/>
-            <a:ext cx="7556399" cy="10692000"/>
-          </a:xfrm>
-          <a:prstGeom prst="rect">
-            <a:avLst/>
-          </a:prstGeom>
-        </p:spPr>
-      </p:pic>
-      <p:sp>
-        <p:nvSpPr>
-          <p:cNvPr id="3" name="TextBox 2"/>
+      <p:sp>
+        <p:nvSpPr>
+          <p:cNvPr id="2" name="TextBox 1"/>
           <p:cNvSpPr txBox="1"/>
           <p:nvPr/>
         </p:nvSpPr>
@@ -3185,7 +3162,7 @@
       </p:sp>
       <p:sp>
         <p:nvSpPr>
-          <p:cNvPr id="4" name="Rectangle 3"/>
+          <p:cNvPr id="3" name="Rectangle 2"/>
           <p:cNvSpPr/>
           <p:nvPr/>
         </p:nvSpPr>
@@ -3228,7 +3205,7 @@
       </p:sp>
       <p:sp>
         <p:nvSpPr>
-          <p:cNvPr id="5" name="TextBox 4"/>
+          <p:cNvPr id="4" name="TextBox 3"/>
           <p:cNvSpPr txBox="1"/>
           <p:nvPr/>
         </p:nvSpPr>
@@ -3346,7 +3323,7 @@
       </p:sp>
       <p:sp>
         <p:nvSpPr>
-          <p:cNvPr id="6" name="Rectangle 5"/>
+          <p:cNvPr id="5" name="Rectangle 4"/>
           <p:cNvSpPr/>
           <p:nvPr/>
         </p:nvSpPr>
@@ -3389,7 +3366,7 @@
       </p:sp>
       <p:sp>
         <p:nvSpPr>
-          <p:cNvPr id="7" name="TextBox 6"/>
+          <p:cNvPr id="6" name="TextBox 5"/>
           <p:cNvSpPr txBox="1"/>
           <p:nvPr/>
         </p:nvSpPr>
@@ -3507,7 +3484,7 @@
       </p:sp>
       <p:sp>
         <p:nvSpPr>
-          <p:cNvPr id="8" name="Rectangle 7"/>
+          <p:cNvPr id="7" name="Rectangle 6"/>
           <p:cNvSpPr/>
           <p:nvPr/>
         </p:nvSpPr>
@@ -3550,7 +3527,7 @@
       </p:sp>
       <p:sp>
         <p:nvSpPr>
-          <p:cNvPr id="9" name="Rectangle 8"/>
+          <p:cNvPr id="8" name="Rectangle 7"/>
           <p:cNvSpPr/>
           <p:nvPr/>
         </p:nvSpPr>
@@ -3591,7 +3568,7 @@
       </p:sp>
       <p:sp>
         <p:nvSpPr>
-          <p:cNvPr id="10" name="Rectangle 9"/>
+          <p:cNvPr id="9" name="Rectangle 8"/>
           <p:cNvSpPr/>
           <p:nvPr/>
         </p:nvSpPr>
@@ -3632,7 +3609,7 @@
       </p:sp>
       <p:sp>
         <p:nvSpPr>
-          <p:cNvPr id="11" name="TextBox 10"/>
+          <p:cNvPr id="10" name="TextBox 9"/>
           <p:cNvSpPr txBox="1"/>
           <p:nvPr/>
         </p:nvSpPr>
@@ -3674,7 +3651,7 @@
       </p:sp>
       <p:sp>
         <p:nvSpPr>
-          <p:cNvPr id="12" name="TextBox 11"/>
+          <p:cNvPr id="11" name="TextBox 10"/>
           <p:cNvSpPr txBox="1"/>
           <p:nvPr/>
         </p:nvSpPr>
@@ -3754,7 +3731,7 @@
       </p:sp>
       <p:sp>
         <p:nvSpPr>
-          <p:cNvPr id="13" name="Rectangle 12"/>
+          <p:cNvPr id="12" name="Rectangle 11"/>
           <p:cNvSpPr/>
           <p:nvPr/>
         </p:nvSpPr>
@@ -3797,7 +3774,7 @@
       </p:sp>
       <p:sp>
         <p:nvSpPr>
-          <p:cNvPr id="14" name="Rectangle 13"/>
+          <p:cNvPr id="13" name="Rectangle 12"/>
           <p:cNvSpPr/>
           <p:nvPr/>
         </p:nvSpPr>
@@ -3838,7 +3815,7 @@
       </p:sp>
       <p:sp>
         <p:nvSpPr>
-          <p:cNvPr id="15" name="Rectangle 14"/>
+          <p:cNvPr id="14" name="Rectangle 13"/>
           <p:cNvSpPr/>
           <p:nvPr/>
         </p:nvSpPr>
@@ -3879,7 +3856,7 @@
       </p:sp>
       <p:sp>
         <p:nvSpPr>
-          <p:cNvPr id="16" name="TextBox 15"/>
+          <p:cNvPr id="15" name="TextBox 14"/>
           <p:cNvSpPr txBox="1"/>
           <p:nvPr/>
         </p:nvSpPr>
@@ -3921,7 +3898,7 @@
       </p:sp>
       <p:sp>
         <p:nvSpPr>
-          <p:cNvPr id="17" name="TextBox 16"/>
+          <p:cNvPr id="16" name="TextBox 15"/>
           <p:cNvSpPr txBox="1"/>
           <p:nvPr/>
         </p:nvSpPr>
@@ -4001,7 +3978,7 @@
       </p:sp>
       <p:sp>
         <p:nvSpPr>
-          <p:cNvPr id="18" name="Rectangle 17"/>
+          <p:cNvPr id="17" name="Rectangle 16"/>
           <p:cNvSpPr/>
           <p:nvPr/>
         </p:nvSpPr>
@@ -4044,7 +4021,7 @@
       </p:sp>
       <p:sp>
         <p:nvSpPr>
-          <p:cNvPr id="19" name="Rectangle 18"/>
+          <p:cNvPr id="18" name="Rectangle 17"/>
           <p:cNvSpPr/>
           <p:nvPr/>
         </p:nvSpPr>
@@ -4085,7 +4062,7 @@
       </p:sp>
       <p:sp>
         <p:nvSpPr>
-          <p:cNvPr id="20" name="Rectangle 19"/>
+          <p:cNvPr id="19" name="Rectangle 18"/>
           <p:cNvSpPr/>
           <p:nvPr/>
         </p:nvSpPr>
@@ -4126,7 +4103,7 @@
       </p:sp>
       <p:sp>
         <p:nvSpPr>
-          <p:cNvPr id="21" name="TextBox 20"/>
+          <p:cNvPr id="20" name="TextBox 19"/>
           <p:cNvSpPr txBox="1"/>
           <p:nvPr/>
         </p:nvSpPr>
@@ -4168,7 +4145,7 @@
       </p:sp>
       <p:sp>
         <p:nvSpPr>
-          <p:cNvPr id="22" name="TextBox 21"/>
+          <p:cNvPr id="21" name="TextBox 20"/>
           <p:cNvSpPr txBox="1"/>
           <p:nvPr/>
         </p:nvSpPr>
@@ -4248,7 +4225,7 @@
       </p:sp>
       <p:sp>
         <p:nvSpPr>
-          <p:cNvPr id="23" name="Rectangle 22"/>
+          <p:cNvPr id="22" name="Rectangle 21"/>
           <p:cNvSpPr/>
           <p:nvPr/>
         </p:nvSpPr>
@@ -4291,7 +4268,7 @@
       </p:sp>
       <p:sp>
         <p:nvSpPr>
-          <p:cNvPr id="24" name="Rectangle 23"/>
+          <p:cNvPr id="23" name="Rectangle 22"/>
           <p:cNvSpPr/>
           <p:nvPr/>
         </p:nvSpPr>
@@ -4332,7 +4309,7 @@
       </p:sp>
       <p:sp>
         <p:nvSpPr>
-          <p:cNvPr id="25" name="Rectangle 24"/>
+          <p:cNvPr id="24" name="Rectangle 23"/>
           <p:cNvSpPr/>
           <p:nvPr/>
         </p:nvSpPr>
@@ -4373,7 +4350,7 @@
       </p:sp>
       <p:sp>
         <p:nvSpPr>
-          <p:cNvPr id="26" name="TextBox 25"/>
+          <p:cNvPr id="25" name="TextBox 24"/>
           <p:cNvSpPr txBox="1"/>
           <p:nvPr/>
         </p:nvSpPr>
@@ -4415,7 +4392,7 @@
       </p:sp>
       <p:sp>
         <p:nvSpPr>
-          <p:cNvPr id="27" name="TextBox 26"/>
+          <p:cNvPr id="26" name="TextBox 25"/>
           <p:cNvSpPr txBox="1"/>
           <p:nvPr/>
         </p:nvSpPr>
@@ -4495,7 +4472,7 @@
       </p:sp>
       <p:sp>
         <p:nvSpPr>
-          <p:cNvPr id="28" name="Rectangle 27"/>
+          <p:cNvPr id="27" name="Rectangle 26"/>
           <p:cNvSpPr/>
           <p:nvPr/>
         </p:nvSpPr>
@@ -4538,7 +4515,7 @@
       </p:sp>
       <p:sp>
         <p:nvSpPr>
-          <p:cNvPr id="29" name="Rectangle 28"/>
+          <p:cNvPr id="28" name="Rectangle 27"/>
           <p:cNvSpPr/>
           <p:nvPr/>
         </p:nvSpPr>
@@ -4579,7 +4556,7 @@
       </p:sp>
       <p:sp>
         <p:nvSpPr>
-          <p:cNvPr id="30" name="Rectangle 29"/>
+          <p:cNvPr id="29" name="Rectangle 28"/>
           <p:cNvSpPr/>
           <p:nvPr/>
         </p:nvSpPr>
@@ -4620,7 +4597,7 @@
       </p:sp>
       <p:sp>
         <p:nvSpPr>
-          <p:cNvPr id="31" name="TextBox 30"/>
+          <p:cNvPr id="30" name="TextBox 29"/>
           <p:cNvSpPr txBox="1"/>
           <p:nvPr/>
         </p:nvSpPr>
@@ -4662,7 +4639,7 @@
       </p:sp>
       <p:sp>
         <p:nvSpPr>
-          <p:cNvPr id="32" name="TextBox 31"/>
+          <p:cNvPr id="31" name="TextBox 30"/>
           <p:cNvSpPr txBox="1"/>
           <p:nvPr/>
         </p:nvSpPr>
@@ -4742,7 +4719,7 @@
       </p:sp>
       <p:sp>
         <p:nvSpPr>
-          <p:cNvPr id="33" name="Rectangle 32"/>
+          <p:cNvPr id="32" name="Rectangle 31"/>
           <p:cNvSpPr/>
           <p:nvPr/>
         </p:nvSpPr>
@@ -4785,7 +4762,7 @@
       </p:sp>
       <p:sp>
         <p:nvSpPr>
-          <p:cNvPr id="34" name="Rectangle 33"/>
+          <p:cNvPr id="33" name="Rectangle 32"/>
           <p:cNvSpPr/>
           <p:nvPr/>
         </p:nvSpPr>
@@ -4826,7 +4803,7 @@
       </p:sp>
       <p:sp>
         <p:nvSpPr>
-          <p:cNvPr id="35" name="Rectangle 34"/>
+          <p:cNvPr id="34" name="Rectangle 33"/>
           <p:cNvSpPr/>
           <p:nvPr/>
         </p:nvSpPr>
@@ -4867,7 +4844,7 @@
       </p:sp>
       <p:sp>
         <p:nvSpPr>
-          <p:cNvPr id="36" name="TextBox 35"/>
+          <p:cNvPr id="35" name="TextBox 34"/>
           <p:cNvSpPr txBox="1"/>
           <p:nvPr/>
         </p:nvSpPr>
@@ -4909,7 +4886,7 @@
       </p:sp>
       <p:sp>
         <p:nvSpPr>
-          <p:cNvPr id="37" name="TextBox 36"/>
+          <p:cNvPr id="36" name="TextBox 35"/>
           <p:cNvSpPr txBox="1"/>
           <p:nvPr/>
         </p:nvSpPr>
@@ -4989,7 +4966,7 @@
       </p:sp>
       <p:sp>
         <p:nvSpPr>
-          <p:cNvPr id="38" name="Rectangle 37"/>
+          <p:cNvPr id="37" name="Rectangle 36"/>
           <p:cNvSpPr/>
           <p:nvPr/>
         </p:nvSpPr>
@@ -5032,7 +5009,7 @@
       </p:sp>
       <p:sp>
         <p:nvSpPr>
-          <p:cNvPr id="39" name="Rectangle 38"/>
+          <p:cNvPr id="38" name="Rectangle 37"/>
           <p:cNvSpPr/>
           <p:nvPr/>
         </p:nvSpPr>
@@ -5073,7 +5050,7 @@
       </p:sp>
       <p:sp>
         <p:nvSpPr>
-          <p:cNvPr id="40" name="Rectangle 39"/>
+          <p:cNvPr id="39" name="Rectangle 38"/>
           <p:cNvSpPr/>
           <p:nvPr/>
         </p:nvSpPr>
@@ -5114,7 +5091,7 @@
       </p:sp>
       <p:sp>
         <p:nvSpPr>
-          <p:cNvPr id="41" name="TextBox 40"/>
+          <p:cNvPr id="40" name="TextBox 39"/>
           <p:cNvSpPr txBox="1"/>
           <p:nvPr/>
         </p:nvSpPr>
@@ -5156,7 +5133,7 @@
       </p:sp>
       <p:sp>
         <p:nvSpPr>
-          <p:cNvPr id="42" name="TextBox 41"/>
+          <p:cNvPr id="41" name="TextBox 40"/>
           <p:cNvSpPr txBox="1"/>
           <p:nvPr/>
         </p:nvSpPr>
@@ -5236,7 +5213,7 @@
       </p:sp>
       <p:sp>
         <p:nvSpPr>
-          <p:cNvPr id="43" name="Rectangle 42"/>
+          <p:cNvPr id="42" name="Rectangle 41"/>
           <p:cNvSpPr/>
           <p:nvPr/>
         </p:nvSpPr>
@@ -5279,7 +5256,7 @@
       </p:sp>
       <p:sp>
         <p:nvSpPr>
-          <p:cNvPr id="44" name="Rectangle 43"/>
+          <p:cNvPr id="43" name="Rectangle 42"/>
           <p:cNvSpPr/>
           <p:nvPr/>
         </p:nvSpPr>
@@ -5320,7 +5297,7 @@
       </p:sp>
       <p:sp>
         <p:nvSpPr>
-          <p:cNvPr id="45" name="Rectangle 44"/>
+          <p:cNvPr id="44" name="Rectangle 43"/>
           <p:cNvSpPr/>
           <p:nvPr/>
         </p:nvSpPr>
@@ -5361,7 +5338,7 @@
       </p:sp>
       <p:sp>
         <p:nvSpPr>
-          <p:cNvPr id="46" name="TextBox 45"/>
+          <p:cNvPr id="45" name="TextBox 44"/>
           <p:cNvSpPr txBox="1"/>
           <p:nvPr/>
         </p:nvSpPr>
@@ -5403,7 +5380,7 @@
       </p:sp>
       <p:sp>
         <p:nvSpPr>
-          <p:cNvPr id="47" name="TextBox 46"/>
+          <p:cNvPr id="46" name="TextBox 45"/>
           <p:cNvSpPr txBox="1"/>
           <p:nvPr/>
         </p:nvSpPr>
@@ -5483,7 +5460,7 @@
       </p:sp>
       <p:sp>
         <p:nvSpPr>
-          <p:cNvPr id="48" name="Rectangle 47"/>
+          <p:cNvPr id="47" name="Rectangle 46"/>
           <p:cNvSpPr/>
           <p:nvPr/>
         </p:nvSpPr>
@@ -5526,7 +5503,7 @@
       </p:sp>
       <p:sp>
         <p:nvSpPr>
-          <p:cNvPr id="49" name="Rectangle 48"/>
+          <p:cNvPr id="48" name="Rectangle 47"/>
           <p:cNvSpPr/>
           <p:nvPr/>
         </p:nvSpPr>
@@ -5567,7 +5544,7 @@
       </p:sp>
       <p:sp>
         <p:nvSpPr>
-          <p:cNvPr id="50" name="Rectangle 49"/>
+          <p:cNvPr id="49" name="Rectangle 48"/>
           <p:cNvSpPr/>
           <p:nvPr/>
         </p:nvSpPr>
@@ -5608,7 +5585,7 @@
       </p:sp>
       <p:sp>
         <p:nvSpPr>
-          <p:cNvPr id="51" name="TextBox 50"/>
+          <p:cNvPr id="50" name="TextBox 49"/>
           <p:cNvSpPr txBox="1"/>
           <p:nvPr/>
         </p:nvSpPr>
@@ -5650,7 +5627,7 @@
       </p:sp>
       <p:sp>
         <p:nvSpPr>
-          <p:cNvPr id="52" name="TextBox 51"/>
+          <p:cNvPr id="51" name="TextBox 50"/>
           <p:cNvSpPr txBox="1"/>
           <p:nvPr/>
         </p:nvSpPr>
@@ -5730,7 +5707,7 @@
       </p:sp>
       <p:sp>
         <p:nvSpPr>
-          <p:cNvPr id="53" name="Rectangle 52"/>
+          <p:cNvPr id="52" name="Rectangle 51"/>
           <p:cNvSpPr/>
           <p:nvPr/>
         </p:nvSpPr>
@@ -5771,7 +5748,7 @@
       </p:sp>
       <p:sp>
         <p:nvSpPr>
-          <p:cNvPr id="54" name="TextBox 53"/>
+          <p:cNvPr id="53" name="TextBox 52"/>
           <p:cNvSpPr txBox="1"/>
           <p:nvPr/>
         </p:nvSpPr>

--- a/assets/fiches/B8-fiche-1h.pptx
+++ b/assets/fiches/B8-fiche-1h.pptx
@@ -4218,7 +4218,7 @@
                 </a:solidFill>
                 <a:latin typeface="Arial"/>
               </a:rPr>
-              <a:t>. Il existe aujourd'hui des dizaines d'applications pour gérer ses finances. Voici les plus populaires en France, pour tous les profils :</a:t>
+              <a:t>. Il existe aujourd'hui des dizaines d'applications pour gérer ses finances. Voici les plus populaires</a:t>
             </a:r>
           </a:p>
         </p:txBody>
@@ -4712,7 +4712,7 @@
                 </a:solidFill>
                 <a:latin typeface="Arial"/>
               </a:rPr>
-              <a:t>. Se lancer dans la gestion budgétaire numérique ne prend que quelques minutes. Suivez ces étapes simples pour démarrer sur de bonnes bases :</a:t>
+              <a:t>. Se lancer dans la gestion budgétaire numérique ne prend que quelques minutes. Suivez ces étapes simples_x000B_pour démarrer sur de bonnes bases :</a:t>
             </a:r>
           </a:p>
         </p:txBody>
@@ -4959,7 +4959,7 @@
                 </a:solidFill>
                 <a:latin typeface="Arial"/>
               </a:rPr>
-              <a:t>. Au-delà des applications, quelques méthodes éprouvées permettent de transformer ses habitudes financières en profondeur :</a:t>
+              <a:t>. Au-delà des applications, quelques méthodes éprouvées permettent de transformer ses habitudes_x000B_financières en profondeur :</a:t>
             </a:r>
           </a:p>
         </p:txBody>
@@ -5453,7 +5453,7 @@
                 </a:solidFill>
                 <a:latin typeface="Arial"/>
               </a:rPr>
-              <a:t>. La principale réticence à utiliser ces outils est souvent la question de la sécurité. Voici les éléments essentiels pour faire des choix éclairés et serein :</a:t>
+              <a:t>. La principale réticence à utiliser ces outils est souvent la question de la sécurité. Voici les éléments_x000B_essentiels pour faire des choix éclairés et serein :</a:t>
             </a:r>
           </a:p>
         </p:txBody>
